--- a/public/fun/pack/pptx/wedding/결혼식_21_소개중심_대나무숲.pptx
+++ b/public/fun/pack/pptx/wedding/결혼식_21_소개중심_대나무숲.pptx
@@ -3347,7 +3347,7 @@
             <a:r>
               <a:rPr sz="3600" b="1" i="0">
                 <a:solidFill>
-                  <a:srgbClr val="1C3629"/>
+                  <a:srgbClr val="115F5B"/>
                 </a:solidFill>
               </a:rPr>
               <a:t>저희 결혼합니다</a:t>
@@ -3385,7 +3385,7 @@
             <a:r>
               <a:rPr sz="1700" b="0" i="1">
                 <a:solidFill>
-                  <a:srgbClr val="1C3629"/>
+                  <a:srgbClr val="115F5B"/>
                 </a:solidFill>
               </a:rPr>
               <a:t>한여름에 올립니다, 시원하게 와 주세요</a:t>
@@ -3487,7 +3487,7 @@
             <a:avLst/>
           </a:prstGeom>
           <a:solidFill>
-            <a:srgbClr val="D5ECE0"/>
+            <a:srgbClr val="D1FAF8"/>
           </a:solidFill>
           <a:ln>
             <a:noFill/>
@@ -3516,7 +3516,7 @@
             <a:avLst/>
           </a:prstGeom>
           <a:solidFill>
-            <a:srgbClr val="396F54"/>
+            <a:srgbClr val="26C5BD"/>
           </a:solidFill>
           <a:ln>
             <a:noFill/>
@@ -3560,7 +3560,7 @@
             <a:r>
               <a:rPr sz="3000" b="1" i="0">
                 <a:solidFill>
-                  <a:srgbClr val="1C3629"/>
+                  <a:srgbClr val="115F5B"/>
                 </a:solidFill>
               </a:rPr>
               <a:t>신랑 · 신부 소개</a:t>
@@ -3583,11 +3583,11 @@
             <a:avLst/>
           </a:prstGeom>
           <a:solidFill>
-            <a:srgbClr val="D5ECE0"/>
+            <a:srgbClr val="D1FAF8"/>
           </a:solidFill>
           <a:ln w="19050">
             <a:solidFill>
-              <a:srgbClr val="396F54"/>
+              <a:srgbClr val="26C5BD"/>
             </a:solidFill>
             <a:prstDash val="dash"/>
           </a:ln>
@@ -3606,7 +3606,7 @@
             <a:r>
               <a:rPr sz="1200" b="0" i="0">
                 <a:solidFill>
-                  <a:srgbClr val="1C3629"/>
+                  <a:srgbClr val="115F5B"/>
                 </a:solidFill>
               </a:rPr>
               <a:t>사진</a:t>
@@ -3644,7 +3644,7 @@
             <a:r>
               <a:rPr sz="1600" b="1" i="0">
                 <a:solidFill>
-                  <a:srgbClr val="1C3629"/>
+                  <a:srgbClr val="115F5B"/>
                 </a:solidFill>
               </a:rPr>
               <a:t>신랑</a:t>
@@ -3735,11 +3735,11 @@
             <a:avLst/>
           </a:prstGeom>
           <a:solidFill>
-            <a:srgbClr val="D5ECE0"/>
+            <a:srgbClr val="D1FAF8"/>
           </a:solidFill>
           <a:ln w="19050">
             <a:solidFill>
-              <a:srgbClr val="396F54"/>
+              <a:srgbClr val="26C5BD"/>
             </a:solidFill>
             <a:prstDash val="dash"/>
           </a:ln>
@@ -3758,7 +3758,7 @@
             <a:r>
               <a:rPr sz="1200" b="0" i="0">
                 <a:solidFill>
-                  <a:srgbClr val="1C3629"/>
+                  <a:srgbClr val="115F5B"/>
                 </a:solidFill>
               </a:rPr>
               <a:t>사진</a:t>
@@ -3796,7 +3796,7 @@
             <a:r>
               <a:rPr sz="1600" b="1" i="0">
                 <a:solidFill>
-                  <a:srgbClr val="1C3629"/>
+                  <a:srgbClr val="115F5B"/>
                 </a:solidFill>
               </a:rPr>
               <a:t>신부</a:t>
@@ -3913,7 +3913,7 @@
             <a:avLst/>
           </a:prstGeom>
           <a:solidFill>
-            <a:srgbClr val="D5ECE0"/>
+            <a:srgbClr val="D1FAF8"/>
           </a:solidFill>
           <a:ln>
             <a:noFill/>
@@ -3942,7 +3942,7 @@
             <a:avLst/>
           </a:prstGeom>
           <a:solidFill>
-            <a:srgbClr val="396F54"/>
+            <a:srgbClr val="26C5BD"/>
           </a:solidFill>
           <a:ln>
             <a:noFill/>
@@ -3986,7 +3986,7 @@
             <a:r>
               <a:rPr sz="3000" b="1" i="0">
                 <a:solidFill>
-                  <a:srgbClr val="1C3629"/>
+                  <a:srgbClr val="115F5B"/>
                 </a:solidFill>
               </a:rPr>
               <a:t>우리 두 사람</a:t>
@@ -4011,11 +4011,11 @@
             </a:avLst>
           </a:prstGeom>
           <a:solidFill>
-            <a:srgbClr val="F2F8F5"/>
+            <a:srgbClr val="EEFCFB"/>
           </a:solidFill>
           <a:ln w="12700">
             <a:solidFill>
-              <a:srgbClr val="D5ECE0"/>
+              <a:srgbClr val="D1FAF8"/>
             </a:solidFill>
           </a:ln>
         </p:spPr>
@@ -4044,7 +4044,7 @@
             </a:avLst>
           </a:prstGeom>
           <a:solidFill>
-            <a:srgbClr val="396F54"/>
+            <a:srgbClr val="26C5BD"/>
           </a:solidFill>
           <a:ln>
             <a:noFill/>
@@ -4196,11 +4196,11 @@
             </a:avLst>
           </a:prstGeom>
           <a:solidFill>
-            <a:srgbClr val="D5ECE0"/>
+            <a:srgbClr val="D1FAF8"/>
           </a:solidFill>
           <a:ln w="12700">
             <a:solidFill>
-              <a:srgbClr val="D5ECE0"/>
+              <a:srgbClr val="D1FAF8"/>
             </a:solidFill>
           </a:ln>
         </p:spPr>
@@ -4229,7 +4229,7 @@
             </a:avLst>
           </a:prstGeom>
           <a:solidFill>
-            <a:srgbClr val="1C3629"/>
+            <a:srgbClr val="115F5B"/>
           </a:solidFill>
           <a:ln>
             <a:noFill/>
@@ -4405,7 +4405,7 @@
             <a:avLst/>
           </a:prstGeom>
           <a:solidFill>
-            <a:srgbClr val="D5ECE0"/>
+            <a:srgbClr val="D1FAF8"/>
           </a:solidFill>
           <a:ln>
             <a:noFill/>
@@ -4434,7 +4434,7 @@
             <a:avLst/>
           </a:prstGeom>
           <a:solidFill>
-            <a:srgbClr val="396F54"/>
+            <a:srgbClr val="26C5BD"/>
           </a:solidFill>
           <a:ln>
             <a:noFill/>
@@ -4478,7 +4478,7 @@
             <a:r>
               <a:rPr sz="3000" b="1" i="0">
                 <a:solidFill>
-                  <a:srgbClr val="1C3629"/>
+                  <a:srgbClr val="115F5B"/>
                 </a:solidFill>
               </a:rPr>
               <a:t>서로에게 하고 싶은 말</a:t>
@@ -4503,11 +4503,11 @@
             </a:avLst>
           </a:prstGeom>
           <a:solidFill>
-            <a:srgbClr val="F2F8F5"/>
+            <a:srgbClr val="EEFCFB"/>
           </a:solidFill>
           <a:ln w="12700">
             <a:solidFill>
-              <a:srgbClr val="D5ECE0"/>
+              <a:srgbClr val="D1FAF8"/>
             </a:solidFill>
           </a:ln>
         </p:spPr>
@@ -4536,7 +4536,7 @@
             </a:avLst>
           </a:prstGeom>
           <a:solidFill>
-            <a:srgbClr val="396F54"/>
+            <a:srgbClr val="26C5BD"/>
           </a:solidFill>
           <a:ln>
             <a:noFill/>
@@ -4648,11 +4648,11 @@
             </a:avLst>
           </a:prstGeom>
           <a:solidFill>
-            <a:srgbClr val="D5ECE0"/>
+            <a:srgbClr val="D1FAF8"/>
           </a:solidFill>
           <a:ln w="12700">
             <a:solidFill>
-              <a:srgbClr val="D5ECE0"/>
+              <a:srgbClr val="D1FAF8"/>
             </a:solidFill>
           </a:ln>
         </p:spPr>
@@ -4681,7 +4681,7 @@
             </a:avLst>
           </a:prstGeom>
           <a:solidFill>
-            <a:srgbClr val="1C3629"/>
+            <a:srgbClr val="115F5B"/>
           </a:solidFill>
           <a:ln>
             <a:noFill/>
@@ -4817,7 +4817,7 @@
             <a:avLst/>
           </a:prstGeom>
           <a:solidFill>
-            <a:srgbClr val="D5ECE0"/>
+            <a:srgbClr val="D1FAF8"/>
           </a:solidFill>
           <a:ln>
             <a:noFill/>
@@ -4846,7 +4846,7 @@
             <a:avLst/>
           </a:prstGeom>
           <a:solidFill>
-            <a:srgbClr val="396F54"/>
+            <a:srgbClr val="26C5BD"/>
           </a:solidFill>
           <a:ln>
             <a:noFill/>
@@ -4890,7 +4890,7 @@
             <a:r>
               <a:rPr sz="3000" b="1" i="0">
                 <a:solidFill>
-                  <a:srgbClr val="1C3629"/>
+                  <a:srgbClr val="115F5B"/>
                 </a:solidFill>
               </a:rPr>
               <a:t>웨딩 사진</a:t>
@@ -4915,11 +4915,11 @@
             </a:avLst>
           </a:prstGeom>
           <a:solidFill>
-            <a:srgbClr val="D5ECE0"/>
+            <a:srgbClr val="D1FAF8"/>
           </a:solidFill>
           <a:ln w="19050">
             <a:solidFill>
-              <a:srgbClr val="396F54"/>
+              <a:srgbClr val="26C5BD"/>
             </a:solidFill>
             <a:prstDash val="dash"/>
           </a:ln>
@@ -4938,7 +4938,7 @@
             <a:r>
               <a:rPr sz="1200" b="0" i="0">
                 <a:solidFill>
-                  <a:srgbClr val="1C3629"/>
+                  <a:srgbClr val="115F5B"/>
                 </a:solidFill>
               </a:rPr>
               <a:t>사진 1</a:t>
@@ -4963,11 +4963,11 @@
             </a:avLst>
           </a:prstGeom>
           <a:solidFill>
-            <a:srgbClr val="D5ECE0"/>
+            <a:srgbClr val="D1FAF8"/>
           </a:solidFill>
           <a:ln w="19050">
             <a:solidFill>
-              <a:srgbClr val="396F54"/>
+              <a:srgbClr val="26C5BD"/>
             </a:solidFill>
             <a:prstDash val="dash"/>
           </a:ln>
@@ -4986,7 +4986,7 @@
             <a:r>
               <a:rPr sz="1200" b="0" i="0">
                 <a:solidFill>
-                  <a:srgbClr val="1C3629"/>
+                  <a:srgbClr val="115F5B"/>
                 </a:solidFill>
               </a:rPr>
               <a:t>사진 2</a:t>
@@ -5011,11 +5011,11 @@
             </a:avLst>
           </a:prstGeom>
           <a:solidFill>
-            <a:srgbClr val="D5ECE0"/>
+            <a:srgbClr val="D1FAF8"/>
           </a:solidFill>
           <a:ln w="19050">
             <a:solidFill>
-              <a:srgbClr val="396F54"/>
+              <a:srgbClr val="26C5BD"/>
             </a:solidFill>
             <a:prstDash val="dash"/>
           </a:ln>
@@ -5034,7 +5034,7 @@
             <a:r>
               <a:rPr sz="1200" b="0" i="0">
                 <a:solidFill>
-                  <a:srgbClr val="1C3629"/>
+                  <a:srgbClr val="115F5B"/>
                 </a:solidFill>
               </a:rPr>
               <a:t>사진 3</a:t>
@@ -5059,11 +5059,11 @@
             </a:avLst>
           </a:prstGeom>
           <a:solidFill>
-            <a:srgbClr val="D5ECE0"/>
+            <a:srgbClr val="D1FAF8"/>
           </a:solidFill>
           <a:ln w="19050">
             <a:solidFill>
-              <a:srgbClr val="396F54"/>
+              <a:srgbClr val="26C5BD"/>
             </a:solidFill>
             <a:prstDash val="dash"/>
           </a:ln>
@@ -5082,7 +5082,7 @@
             <a:r>
               <a:rPr sz="1200" b="0" i="0">
                 <a:solidFill>
-                  <a:srgbClr val="1C3629"/>
+                  <a:srgbClr val="115F5B"/>
                 </a:solidFill>
               </a:rPr>
               <a:t>사진 4</a:t>
@@ -5107,11 +5107,11 @@
             </a:avLst>
           </a:prstGeom>
           <a:solidFill>
-            <a:srgbClr val="D5ECE0"/>
+            <a:srgbClr val="D1FAF8"/>
           </a:solidFill>
           <a:ln w="19050">
             <a:solidFill>
-              <a:srgbClr val="396F54"/>
+              <a:srgbClr val="26C5BD"/>
             </a:solidFill>
             <a:prstDash val="dash"/>
           </a:ln>
@@ -5130,7 +5130,7 @@
             <a:r>
               <a:rPr sz="1200" b="0" i="0">
                 <a:solidFill>
-                  <a:srgbClr val="1C3629"/>
+                  <a:srgbClr val="115F5B"/>
                 </a:solidFill>
               </a:rPr>
               <a:t>사진 5</a:t>
@@ -5155,11 +5155,11 @@
             </a:avLst>
           </a:prstGeom>
           <a:solidFill>
-            <a:srgbClr val="D5ECE0"/>
+            <a:srgbClr val="D1FAF8"/>
           </a:solidFill>
           <a:ln w="19050">
             <a:solidFill>
-              <a:srgbClr val="396F54"/>
+              <a:srgbClr val="26C5BD"/>
             </a:solidFill>
             <a:prstDash val="dash"/>
           </a:ln>
@@ -5178,7 +5178,7 @@
             <a:r>
               <a:rPr sz="1200" b="0" i="0">
                 <a:solidFill>
-                  <a:srgbClr val="1C3629"/>
+                  <a:srgbClr val="115F5B"/>
                 </a:solidFill>
               </a:rPr>
               <a:t>사진 6</a:t>
@@ -5258,7 +5258,7 @@
             <a:r>
               <a:rPr sz="3400" b="1" i="0">
                 <a:solidFill>
-                  <a:srgbClr val="1C3629"/>
+                  <a:srgbClr val="115F5B"/>
                 </a:solidFill>
               </a:rPr>
               <a:t>와 주셔서 고맙습니다</a:t>
@@ -5296,7 +5296,7 @@
             <a:r>
               <a:rPr sz="1700" b="0" i="1">
                 <a:solidFill>
-                  <a:srgbClr val="1C3629"/>
+                  <a:srgbClr val="115F5B"/>
                 </a:solidFill>
               </a:rPr>
               <a:t>잘 살겠습니다</a:t>
@@ -5361,34 +5361,34 @@
         <a:sysClr val="window" lastClr="FFFFFF"/>
       </a:lt1>
       <a:dk2>
-        <a:srgbClr val="1C3629"/>
+        <a:srgbClr val="115F5B"/>
       </a:dk2>
       <a:lt2>
-        <a:srgbClr val="F2F8F5"/>
+        <a:srgbClr val="EEFCFB"/>
       </a:lt2>
       <a:accent1>
-        <a:srgbClr val="396F54"/>
+        <a:srgbClr val="26C5BD"/>
       </a:accent1>
       <a:accent2>
-        <a:srgbClr val="874587"/>
+        <a:srgbClr val="209DB6"/>
       </a:accent2>
       <a:accent3>
-        <a:srgbClr val="1C3629"/>
+        <a:srgbClr val="115F5B"/>
       </a:accent3>
       <a:accent4>
-        <a:srgbClr val="D5ECE0"/>
+        <a:srgbClr val="D1FAF8"/>
       </a:accent4>
       <a:accent5>
-        <a:srgbClr val="605A6E"/>
+        <a:srgbClr val="23B1BA"/>
       </a:accent5>
       <a:accent6>
-        <a:srgbClr val="77867F"/>
+        <a:srgbClr val="709F9D"/>
       </a:accent6>
       <a:hlink>
-        <a:srgbClr val="396F54"/>
+        <a:srgbClr val="26C5BD"/>
       </a:hlink>
       <a:folHlink>
-        <a:srgbClr val="1C3629"/>
+        <a:srgbClr val="115F5B"/>
       </a:folHlink>
     </a:clrScheme>
     <a:fontScheme name="Office">

--- a/public/fun/pack/pptx/wedding/결혼식_21_소개중심_대나무숲.pptx
+++ b/public/fun/pack/pptx/wedding/결혼식_21_소개중심_대나무숲.pptx
@@ -3286,6 +3286,14 @@
 <file path=ppt/slides/slide1.xml><?xml version="1.0" encoding="utf-8"?>
 <p:sld xmlns:a="http://schemas.openxmlformats.org/drawingml/2006/main" xmlns:p="http://schemas.openxmlformats.org/presentationml/2006/main" xmlns:r="http://schemas.openxmlformats.org/officeDocument/2006/relationships">
   <p:cSld>
+    <p:bg>
+      <p:bgPr>
+        <a:solidFill>
+          <a:srgbClr val="EAFDF4"/>
+        </a:solidFill>
+        <a:effectLst/>
+      </p:bgPr>
+    </p:bg>
     <p:spTree>
       <p:nvGrpSpPr>
         <p:cNvPr id="1" name=""/>
@@ -3293,30 +3301,120 @@
         <p:nvPr/>
       </p:nvGrpSpPr>
       <p:grpSpPr/>
-      <p:pic>
-        <p:nvPicPr>
-          <p:cNvPr id="3" name="표지 그림" descr="wedding-21.jpg"/>
-          <p:cNvPicPr>
-            <a:picLocks noChangeAspect="1"/>
-          </p:cNvPicPr>
+      <p:sp>
+        <p:nvSpPr>
+          <p:cNvPr id="3" name="사진 자리"/>
+          <p:cNvSpPr/>
           <p:nvPr/>
-        </p:nvPicPr>
-        <p:blipFill>
-          <a:blip r:embed="rId2"/>
-          <a:stretch>
-            <a:fillRect/>
-          </a:stretch>
-        </p:blipFill>
-        <p:spPr>
-          <a:xfrm>
-            <a:off x="0" y="0"/>
-            <a:ext cx="12191695" cy="6858000"/>
+        </p:nvSpPr>
+        <p:spPr>
+          <a:xfrm>
+            <a:off x="7071183" y="960120"/>
+            <a:ext cx="3657508" cy="4526280"/>
+          </a:xfrm>
+          <a:prstGeom prst="roundRect">
+            <a:avLst>
+              <a:gd name="adj" fmla="val 4000"/>
+            </a:avLst>
+          </a:prstGeom>
+          <a:solidFill>
+            <a:srgbClr val="A5F3CC"/>
+          </a:solidFill>
+          <a:ln>
+            <a:noFill/>
+          </a:ln>
+        </p:spPr>
+        <p:txBody>
+          <a:bodyPr rtlCol="0" anchor="ctr" wrap="square" lIns="54864" rIns="54864" tIns="27432" bIns="27432">
+            <a:noAutofit/>
+          </a:bodyPr>
+          <a:lstStyle/>
+          <a:p>
+            <a:pPr algn="ctr">
+              <a:lnSpc>
+                <a:spcPct val="100000"/>
+              </a:lnSpc>
+            </a:pPr>
+            <a:r>
+              <a:rPr sz="1400" b="0" i="0">
+                <a:solidFill>
+                  <a:srgbClr val="274938"/>
+                </a:solidFill>
+              </a:rPr>
+              <a:t>사진을 넣어 주세요</a:t>
+            </a:r>
+          </a:p>
+        </p:txBody>
+      </p:sp>
+      <p:sp>
+        <p:nvSpPr>
+          <p:cNvPr id="4" name="장식"/>
+          <p:cNvSpPr/>
+          <p:nvPr/>
+        </p:nvSpPr>
+        <p:spPr>
+          <a:xfrm>
+            <a:off x="7558851" y="1234439"/>
+            <a:ext cx="3657508" cy="4526280"/>
+          </a:xfrm>
+          <a:prstGeom prst="roundRect">
+            <a:avLst>
+              <a:gd name="adj" fmla="val 4000"/>
+            </a:avLst>
+          </a:prstGeom>
+          <a:noFill/>
+          <a:ln w="9525">
+            <a:solidFill>
+              <a:srgbClr val="26231F"/>
+            </a:solidFill>
+          </a:ln>
+        </p:spPr>
+        <p:txBody>
+          <a:bodyPr rtlCol="0" anchor="ctr"/>
+          <a:lstStyle/>
+          <a:p>
+            <a:pPr algn="ctr"/>
+          </a:p>
+        </p:txBody>
+      </p:sp>
+      <p:sp>
+        <p:nvSpPr>
+          <p:cNvPr id="5" name="라벨"/>
+          <p:cNvSpPr txBox="1"/>
+          <p:nvPr/>
+        </p:nvSpPr>
+        <p:spPr>
+          <a:xfrm>
+            <a:off x="822960" y="2148840"/>
+            <a:ext cx="5608179" cy="274320"/>
           </a:xfrm>
           <a:prstGeom prst="rect">
             <a:avLst/>
           </a:prstGeom>
-        </p:spPr>
-      </p:pic>
+          <a:noFill/>
+        </p:spPr>
+        <p:txBody>
+          <a:bodyPr wrap="square" lIns="54864" rIns="54864" tIns="27432" bIns="27432" anchor="t">
+            <a:noAutofit/>
+          </a:bodyPr>
+          <a:lstStyle/>
+          <a:p>
+            <a:pPr algn="l">
+              <a:lnSpc>
+                <a:spcPct val="115000"/>
+              </a:lnSpc>
+            </a:pPr>
+            <a:r>
+              <a:rPr sz="1000" b="1" i="0" spc="250">
+                <a:solidFill>
+                  <a:srgbClr val="26231F"/>
+                </a:solidFill>
+              </a:rPr>
+              <a:t>WEDDING</a:t>
+            </a:r>
+          </a:p>
+        </p:txBody>
+      </p:sp>
       <p:sp>
         <p:nvSpPr>
           <p:cNvPr id="2" name="Title 1"/>
@@ -3329,8 +3427,8 @@
         </p:nvSpPr>
         <p:spPr>
           <a:xfrm>
-            <a:off x="853418" y="2057400"/>
-            <a:ext cx="6095847" cy="1554480"/>
+            <a:off x="822960" y="2606040"/>
+            <a:ext cx="5608179" cy="1188720"/>
           </a:xfrm>
         </p:spPr>
         <p:txBody>
@@ -3347,7 +3445,7 @@
             <a:r>
               <a:rPr sz="3600" b="1" i="0">
                 <a:solidFill>
-                  <a:srgbClr val="115F5B"/>
+                  <a:srgbClr val="26231F"/>
                 </a:solidFill>
               </a:rPr>
               <a:t>저희 결혼합니다</a:t>
@@ -3357,14 +3455,14 @@
       </p:sp>
       <p:sp>
         <p:nvSpPr>
-          <p:cNvPr id="4" name="한 줄 문구"/>
+          <p:cNvPr id="6" name="한 줄 문구"/>
           <p:cNvSpPr txBox="1"/>
           <p:nvPr/>
         </p:nvSpPr>
         <p:spPr>
           <a:xfrm>
-            <a:off x="853418" y="3749039"/>
-            <a:ext cx="6095847" cy="822960"/>
+            <a:off x="822960" y="3886200"/>
+            <a:ext cx="5608179" cy="822960"/>
           </a:xfrm>
           <a:prstGeom prst="rect">
             <a:avLst/>
@@ -3383,26 +3481,26 @@
               </a:lnSpc>
             </a:pPr>
             <a:r>
-              <a:rPr sz="1700" b="0" i="1">
-                <a:solidFill>
-                  <a:srgbClr val="115F5B"/>
+              <a:rPr sz="1700" b="0" i="0">
+                <a:solidFill>
+                  <a:srgbClr val="26231F"/>
                 </a:solidFill>
               </a:rPr>
-              <a:t>한여름에 올립니다, 시원하게 와 주세요</a:t>
-            </a:r>
-          </a:p>
-        </p:txBody>
-      </p:sp>
-      <p:sp>
-        <p:nvSpPr>
-          <p:cNvPr id="5" name="안내 문구"/>
+              <a:t>정성껏 올립니다, 편하게 와 주세요</a:t>
+            </a:r>
+          </a:p>
+        </p:txBody>
+      </p:sp>
+      <p:sp>
+        <p:nvSpPr>
+          <p:cNvPr id="7" name="안내 문구"/>
           <p:cNvSpPr txBox="1"/>
           <p:nvPr/>
         </p:nvSpPr>
         <p:spPr>
           <a:xfrm>
-            <a:off x="853418" y="4617720"/>
-            <a:ext cx="6095847" cy="914400"/>
+            <a:off x="822960" y="4754880"/>
+            <a:ext cx="5608179" cy="914400"/>
           </a:xfrm>
           <a:prstGeom prst="rect">
             <a:avLst/>
@@ -3423,7 +3521,7 @@
             <a:r>
               <a:rPr sz="1400" b="0" i="0">
                 <a:solidFill>
-                  <a:srgbClr val="666666"/>
+                  <a:srgbClr val="26231F"/>
                 </a:solidFill>
               </a:rPr>
               <a:t>신랑 이름 ♥ 신부 이름</a:t>
@@ -3438,10 +3536,10 @@
             <a:r>
               <a:rPr sz="1400" b="0" i="0">
                 <a:solidFill>
-                  <a:srgbClr val="666666"/>
+                  <a:srgbClr val="26231F"/>
                 </a:solidFill>
               </a:rPr>
-              <a:t>2027. 00. 00 · 예식장 이름</a:t>
+              <a:t>날짜 입력 · 예식장 이름</a:t>
             </a:r>
           </a:p>
         </p:txBody>
@@ -3460,7 +3558,7 @@
     <p:bg>
       <p:bgPr>
         <a:solidFill>
-          <a:srgbClr val="FFFFFF"/>
+          <a:srgbClr val="EAFDF4"/>
         </a:solidFill>
         <a:effectLst/>
       </p:bgPr>
@@ -3480,14 +3578,14 @@
         </p:nvSpPr>
         <p:spPr>
           <a:xfrm>
-            <a:off x="-182880" y="6144768"/>
-            <a:ext cx="12557455" cy="731520"/>
-          </a:xfrm>
-          <a:prstGeom prst="wave">
+            <a:off x="640080" y="6400800"/>
+            <a:ext cx="10911535" cy="10972"/>
+          </a:xfrm>
+          <a:prstGeom prst="rect">
             <a:avLst/>
           </a:prstGeom>
           <a:solidFill>
-            <a:srgbClr val="D1FAF8"/>
+            <a:srgbClr val="26231F"/>
           </a:solidFill>
           <a:ln>
             <a:noFill/>
@@ -3503,20 +3601,58 @@
       </p:sp>
       <p:sp>
         <p:nvSpPr>
-          <p:cNvPr id="4" name="장식"/>
+          <p:cNvPr id="4" name="하단 라벨"/>
+          <p:cNvSpPr txBox="1"/>
+          <p:nvPr/>
+        </p:nvSpPr>
+        <p:spPr>
+          <a:xfrm>
+            <a:off x="640080" y="6437376"/>
+            <a:ext cx="5486400" cy="274320"/>
+          </a:xfrm>
+          <a:prstGeom prst="rect">
+            <a:avLst/>
+          </a:prstGeom>
+          <a:noFill/>
+        </p:spPr>
+        <p:txBody>
+          <a:bodyPr wrap="square" lIns="54864" rIns="54864" tIns="27432" bIns="27432" anchor="ctr">
+            <a:noAutofit/>
+          </a:bodyPr>
+          <a:lstStyle/>
+          <a:p>
+            <a:pPr algn="l">
+              <a:lnSpc>
+                <a:spcPct val="115000"/>
+              </a:lnSpc>
+            </a:pPr>
+            <a:r>
+              <a:rPr sz="900" b="1" i="0" spc="250">
+                <a:solidFill>
+                  <a:srgbClr val="26231F"/>
+                </a:solidFill>
+              </a:rPr>
+              <a:t>WEDDING</a:t>
+            </a:r>
+          </a:p>
+        </p:txBody>
+      </p:sp>
+      <p:sp>
+        <p:nvSpPr>
+          <p:cNvPr id="5" name="포인트"/>
           <p:cNvSpPr/>
           <p:nvPr/>
         </p:nvSpPr>
         <p:spPr>
           <a:xfrm>
-            <a:off x="-182880" y="6400800"/>
-            <a:ext cx="12557455" cy="502920"/>
-          </a:xfrm>
-          <a:prstGeom prst="wave">
+            <a:off x="11213287" y="6473952"/>
+            <a:ext cx="219456" cy="219456"/>
+          </a:xfrm>
+          <a:prstGeom prst="heart">
             <a:avLst/>
           </a:prstGeom>
           <a:solidFill>
-            <a:srgbClr val="26C5BD"/>
+            <a:srgbClr val="7BEAB3"/>
           </a:solidFill>
           <a:ln>
             <a:noFill/>
@@ -3542,8 +3678,8 @@
         </p:nvSpPr>
         <p:spPr>
           <a:xfrm>
-            <a:off x="640080" y="457200"/>
-            <a:ext cx="9722815" cy="868680"/>
+            <a:off x="640080" y="502920"/>
+            <a:ext cx="10911535" cy="914400"/>
           </a:xfrm>
         </p:spPr>
         <p:txBody>
@@ -3560,7 +3696,7 @@
             <a:r>
               <a:rPr sz="3000" b="1" i="0">
                 <a:solidFill>
-                  <a:srgbClr val="115F5B"/>
+                  <a:srgbClr val="26231F"/>
                 </a:solidFill>
               </a:rPr>
               <a:t>신랑 · 신부 소개</a:t>
@@ -3570,25 +3706,23 @@
       </p:sp>
       <p:sp>
         <p:nvSpPr>
-          <p:cNvPr id="5" name="사진 자리"/>
+          <p:cNvPr id="6" name="사진 자리"/>
           <p:cNvSpPr/>
           <p:nvPr/>
         </p:nvSpPr>
         <p:spPr>
           <a:xfrm>
-            <a:off x="2042083" y="1554480"/>
-            <a:ext cx="2194560" cy="2194560"/>
+            <a:off x="1996363" y="1600200"/>
+            <a:ext cx="2286000" cy="2286000"/>
           </a:xfrm>
           <a:prstGeom prst="ellipse">
             <a:avLst/>
           </a:prstGeom>
           <a:solidFill>
-            <a:srgbClr val="D1FAF8"/>
+            <a:srgbClr val="D1FAE6"/>
           </a:solidFill>
           <a:ln w="19050">
-            <a:solidFill>
-              <a:srgbClr val="26C5BD"/>
-            </a:solidFill>
+            <a:noFill/>
             <a:prstDash val="dash"/>
           </a:ln>
         </p:spPr>
@@ -3606,7 +3740,7 @@
             <a:r>
               <a:rPr sz="1200" b="0" i="0">
                 <a:solidFill>
-                  <a:srgbClr val="115F5B"/>
+                  <a:srgbClr val="8E8780"/>
                 </a:solidFill>
               </a:rPr>
               <a:t>사진</a:t>
@@ -3616,13 +3750,13 @@
       </p:sp>
       <p:sp>
         <p:nvSpPr>
-          <p:cNvPr id="6" name="TextBox 5"/>
+          <p:cNvPr id="7" name="TextBox 6"/>
           <p:cNvSpPr txBox="1"/>
           <p:nvPr/>
         </p:nvSpPr>
         <p:spPr>
           <a:xfrm>
-            <a:off x="640080" y="3840479"/>
+            <a:off x="640080" y="3977639"/>
             <a:ext cx="4998567" cy="411480"/>
           </a:xfrm>
           <a:prstGeom prst="rect">
@@ -3644,7 +3778,7 @@
             <a:r>
               <a:rPr sz="1600" b="1" i="0">
                 <a:solidFill>
-                  <a:srgbClr val="115F5B"/>
+                  <a:srgbClr val="274938"/>
                 </a:solidFill>
               </a:rPr>
               <a:t>신랑</a:t>
@@ -3654,14 +3788,14 @@
       </p:sp>
       <p:sp>
         <p:nvSpPr>
-          <p:cNvPr id="7" name="TextBox 6"/>
+          <p:cNvPr id="8" name="TextBox 7"/>
           <p:cNvSpPr txBox="1"/>
           <p:nvPr/>
         </p:nvSpPr>
         <p:spPr>
           <a:xfrm>
-            <a:off x="731519" y="4297679"/>
-            <a:ext cx="4815687" cy="1645919"/>
+            <a:off x="731519" y="4434840"/>
+            <a:ext cx="4815687" cy="1737360"/>
           </a:xfrm>
           <a:prstGeom prst="rect">
             <a:avLst/>
@@ -3722,25 +3856,23 @@
       </p:sp>
       <p:sp>
         <p:nvSpPr>
-          <p:cNvPr id="8" name="사진 자리"/>
+          <p:cNvPr id="9" name="사진 자리"/>
           <p:cNvSpPr/>
           <p:nvPr/>
         </p:nvSpPr>
         <p:spPr>
           <a:xfrm>
-            <a:off x="7955051" y="1554480"/>
-            <a:ext cx="2194560" cy="2194560"/>
+            <a:off x="7909331" y="1600200"/>
+            <a:ext cx="2286000" cy="2286000"/>
           </a:xfrm>
           <a:prstGeom prst="ellipse">
             <a:avLst/>
           </a:prstGeom>
           <a:solidFill>
-            <a:srgbClr val="D1FAF8"/>
+            <a:srgbClr val="D1FAE6"/>
           </a:solidFill>
           <a:ln w="19050">
-            <a:solidFill>
-              <a:srgbClr val="26C5BD"/>
-            </a:solidFill>
+            <a:noFill/>
             <a:prstDash val="dash"/>
           </a:ln>
         </p:spPr>
@@ -3758,7 +3890,7 @@
             <a:r>
               <a:rPr sz="1200" b="0" i="0">
                 <a:solidFill>
-                  <a:srgbClr val="115F5B"/>
+                  <a:srgbClr val="8E8780"/>
                 </a:solidFill>
               </a:rPr>
               <a:t>사진</a:t>
@@ -3768,13 +3900,13 @@
       </p:sp>
       <p:sp>
         <p:nvSpPr>
-          <p:cNvPr id="9" name="TextBox 8"/>
+          <p:cNvPr id="10" name="TextBox 9"/>
           <p:cNvSpPr txBox="1"/>
           <p:nvPr/>
         </p:nvSpPr>
         <p:spPr>
           <a:xfrm>
-            <a:off x="6553047" y="3840479"/>
+            <a:off x="6553047" y="3977639"/>
             <a:ext cx="4998567" cy="411480"/>
           </a:xfrm>
           <a:prstGeom prst="rect">
@@ -3796,7 +3928,7 @@
             <a:r>
               <a:rPr sz="1600" b="1" i="0">
                 <a:solidFill>
-                  <a:srgbClr val="115F5B"/>
+                  <a:srgbClr val="274938"/>
                 </a:solidFill>
               </a:rPr>
               <a:t>신부</a:t>
@@ -3806,14 +3938,14 @@
       </p:sp>
       <p:sp>
         <p:nvSpPr>
-          <p:cNvPr id="10" name="TextBox 9"/>
+          <p:cNvPr id="11" name="TextBox 10"/>
           <p:cNvSpPr txBox="1"/>
           <p:nvPr/>
         </p:nvSpPr>
         <p:spPr>
           <a:xfrm>
-            <a:off x="6644487" y="4297679"/>
-            <a:ext cx="4815687" cy="1645919"/>
+            <a:off x="6644487" y="4434840"/>
+            <a:ext cx="4815687" cy="1737360"/>
           </a:xfrm>
           <a:prstGeom prst="rect">
             <a:avLst/>
@@ -3886,7 +4018,7 @@
     <p:bg>
       <p:bgPr>
         <a:solidFill>
-          <a:srgbClr val="FFFFFF"/>
+          <a:srgbClr val="EAFDF4"/>
         </a:solidFill>
         <a:effectLst/>
       </p:bgPr>
@@ -3906,14 +4038,14 @@
         </p:nvSpPr>
         <p:spPr>
           <a:xfrm>
-            <a:off x="-182880" y="6144768"/>
-            <a:ext cx="12557455" cy="731520"/>
-          </a:xfrm>
-          <a:prstGeom prst="wave">
+            <a:off x="640080" y="6400800"/>
+            <a:ext cx="10911535" cy="10972"/>
+          </a:xfrm>
+          <a:prstGeom prst="rect">
             <a:avLst/>
           </a:prstGeom>
           <a:solidFill>
-            <a:srgbClr val="D1FAF8"/>
+            <a:srgbClr val="26231F"/>
           </a:solidFill>
           <a:ln>
             <a:noFill/>
@@ -3929,20 +4061,58 @@
       </p:sp>
       <p:sp>
         <p:nvSpPr>
-          <p:cNvPr id="4" name="장식"/>
+          <p:cNvPr id="4" name="하단 라벨"/>
+          <p:cNvSpPr txBox="1"/>
+          <p:nvPr/>
+        </p:nvSpPr>
+        <p:spPr>
+          <a:xfrm>
+            <a:off x="640080" y="6437376"/>
+            <a:ext cx="5486400" cy="274320"/>
+          </a:xfrm>
+          <a:prstGeom prst="rect">
+            <a:avLst/>
+          </a:prstGeom>
+          <a:noFill/>
+        </p:spPr>
+        <p:txBody>
+          <a:bodyPr wrap="square" lIns="54864" rIns="54864" tIns="27432" bIns="27432" anchor="ctr">
+            <a:noAutofit/>
+          </a:bodyPr>
+          <a:lstStyle/>
+          <a:p>
+            <a:pPr algn="l">
+              <a:lnSpc>
+                <a:spcPct val="115000"/>
+              </a:lnSpc>
+            </a:pPr>
+            <a:r>
+              <a:rPr sz="900" b="1" i="0" spc="250">
+                <a:solidFill>
+                  <a:srgbClr val="26231F"/>
+                </a:solidFill>
+              </a:rPr>
+              <a:t>WEDDING</a:t>
+            </a:r>
+          </a:p>
+        </p:txBody>
+      </p:sp>
+      <p:sp>
+        <p:nvSpPr>
+          <p:cNvPr id="5" name="포인트"/>
           <p:cNvSpPr/>
           <p:nvPr/>
         </p:nvSpPr>
         <p:spPr>
           <a:xfrm>
-            <a:off x="-182880" y="6400800"/>
-            <a:ext cx="12557455" cy="502920"/>
-          </a:xfrm>
-          <a:prstGeom prst="wave">
+            <a:off x="11213287" y="6473952"/>
+            <a:ext cx="219456" cy="219456"/>
+          </a:xfrm>
+          <a:prstGeom prst="heart">
             <a:avLst/>
           </a:prstGeom>
           <a:solidFill>
-            <a:srgbClr val="26C5BD"/>
+            <a:srgbClr val="7BEAB3"/>
           </a:solidFill>
           <a:ln>
             <a:noFill/>
@@ -3968,8 +4138,8 @@
         </p:nvSpPr>
         <p:spPr>
           <a:xfrm>
-            <a:off x="640080" y="457200"/>
-            <a:ext cx="9722815" cy="868680"/>
+            <a:off x="640080" y="502920"/>
+            <a:ext cx="10911535" cy="914400"/>
           </a:xfrm>
         </p:spPr>
         <p:txBody>
@@ -3986,7 +4156,7 @@
             <a:r>
               <a:rPr sz="3000" b="1" i="0">
                 <a:solidFill>
-                  <a:srgbClr val="115F5B"/>
+                  <a:srgbClr val="26231F"/>
                 </a:solidFill>
               </a:rPr>
               <a:t>우리 두 사람</a:t>
@@ -3996,26 +4166,26 @@
       </p:sp>
       <p:sp>
         <p:nvSpPr>
-          <p:cNvPr id="5" name="왼쪽 칸"/>
+          <p:cNvPr id="6" name="왼쪽 칸"/>
           <p:cNvSpPr/>
           <p:nvPr/>
         </p:nvSpPr>
         <p:spPr>
           <a:xfrm>
-            <a:off x="640080" y="1554480"/>
-            <a:ext cx="5272887" cy="4389120"/>
+            <a:off x="640080" y="1600200"/>
+            <a:ext cx="5272887" cy="4572000"/>
           </a:xfrm>
           <a:prstGeom prst="roundRect">
             <a:avLst>
-              <a:gd name="adj" fmla="val 8000"/>
+              <a:gd name="adj" fmla="val 7000"/>
             </a:avLst>
           </a:prstGeom>
           <a:solidFill>
-            <a:srgbClr val="EEFCFB"/>
+            <a:srgbClr val="FFFFFF"/>
           </a:solidFill>
           <a:ln w="12700">
             <a:solidFill>
-              <a:srgbClr val="D1FAF8"/>
+              <a:srgbClr val="A5F3CC"/>
             </a:solidFill>
           </a:ln>
         </p:spPr>
@@ -4029,13 +4199,13 @@
       </p:sp>
       <p:sp>
         <p:nvSpPr>
-          <p:cNvPr id="6" name="칸 제목 바"/>
+          <p:cNvPr id="7" name="칸 제목 바"/>
           <p:cNvSpPr/>
           <p:nvPr/>
         </p:nvSpPr>
         <p:spPr>
           <a:xfrm>
-            <a:off x="640080" y="1554480"/>
+            <a:off x="640080" y="1600200"/>
             <a:ext cx="5272887" cy="640080"/>
           </a:xfrm>
           <a:prstGeom prst="roundRect">
@@ -4044,7 +4214,7 @@
             </a:avLst>
           </a:prstGeom>
           <a:solidFill>
-            <a:srgbClr val="26C5BD"/>
+            <a:srgbClr val="7BEAB3"/>
           </a:solidFill>
           <a:ln>
             <a:noFill/>
@@ -4060,13 +4230,13 @@
       </p:sp>
       <p:sp>
         <p:nvSpPr>
-          <p:cNvPr id="7" name="TextBox 6"/>
+          <p:cNvPr id="8" name="TextBox 7"/>
           <p:cNvSpPr txBox="1"/>
           <p:nvPr/>
         </p:nvSpPr>
         <p:spPr>
           <a:xfrm>
-            <a:off x="822959" y="1554480"/>
+            <a:off x="822959" y="1600200"/>
             <a:ext cx="4907127" cy="640080"/>
           </a:xfrm>
           <a:prstGeom prst="rect">
@@ -4088,7 +4258,7 @@
             <a:r>
               <a:rPr sz="1800" b="1" i="0">
                 <a:solidFill>
-                  <a:srgbClr val="FFFFFF"/>
+                  <a:srgbClr val="26231F"/>
                 </a:solidFill>
               </a:rPr>
               <a:t>닮은 점</a:t>
@@ -4098,14 +4268,14 @@
       </p:sp>
       <p:sp>
         <p:nvSpPr>
-          <p:cNvPr id="8" name="TextBox 7"/>
+          <p:cNvPr id="9" name="TextBox 8"/>
           <p:cNvSpPr txBox="1"/>
           <p:nvPr/>
         </p:nvSpPr>
         <p:spPr>
           <a:xfrm>
-            <a:off x="868680" y="2377440"/>
-            <a:ext cx="4815687" cy="3474720"/>
+            <a:off x="868680" y="2423160"/>
+            <a:ext cx="4815687" cy="3657600"/>
           </a:xfrm>
           <a:prstGeom prst="rect">
             <a:avLst/>
@@ -4131,7 +4301,7 @@
             <a:r>
               <a:rPr sz="1500" b="0" i="0">
                 <a:solidFill>
-                  <a:srgbClr val="2B2B2B"/>
+                  <a:srgbClr val="26231F"/>
                 </a:solidFill>
               </a:rPr>
               <a:t>내용을 입력하세요</a:t>
@@ -4151,7 +4321,7 @@
             <a:r>
               <a:rPr sz="1500" b="0" i="0">
                 <a:solidFill>
-                  <a:srgbClr val="2B2B2B"/>
+                  <a:srgbClr val="26231F"/>
                 </a:solidFill>
               </a:rPr>
               <a:t>내용을 입력하세요</a:t>
@@ -4171,7 +4341,7 @@
             <a:r>
               <a:rPr sz="1500" b="0" i="0">
                 <a:solidFill>
-                  <a:srgbClr val="2B2B2B"/>
+                  <a:srgbClr val="26231F"/>
                 </a:solidFill>
               </a:rPr>
               <a:t>내용을 입력하세요</a:t>
@@ -4181,26 +4351,26 @@
       </p:sp>
       <p:sp>
         <p:nvSpPr>
-          <p:cNvPr id="9" name="오른쪽 칸"/>
+          <p:cNvPr id="10" name="오른쪽 칸"/>
           <p:cNvSpPr/>
           <p:nvPr/>
         </p:nvSpPr>
         <p:spPr>
           <a:xfrm>
-            <a:off x="6278727" y="1554480"/>
-            <a:ext cx="5272887" cy="4389120"/>
+            <a:off x="6278727" y="1600200"/>
+            <a:ext cx="5272887" cy="4572000"/>
           </a:xfrm>
           <a:prstGeom prst="roundRect">
             <a:avLst>
-              <a:gd name="adj" fmla="val 8000"/>
+              <a:gd name="adj" fmla="val 7000"/>
             </a:avLst>
           </a:prstGeom>
           <a:solidFill>
-            <a:srgbClr val="D1FAF8"/>
+            <a:srgbClr val="FFFFFF"/>
           </a:solidFill>
           <a:ln w="12700">
             <a:solidFill>
-              <a:srgbClr val="D1FAF8"/>
+              <a:srgbClr val="A5F3CC"/>
             </a:solidFill>
           </a:ln>
         </p:spPr>
@@ -4214,13 +4384,13 @@
       </p:sp>
       <p:sp>
         <p:nvSpPr>
-          <p:cNvPr id="10" name="칸 제목 바"/>
+          <p:cNvPr id="11" name="칸 제목 바"/>
           <p:cNvSpPr/>
           <p:nvPr/>
         </p:nvSpPr>
         <p:spPr>
           <a:xfrm>
-            <a:off x="6278727" y="1554480"/>
+            <a:off x="6278727" y="1600200"/>
             <a:ext cx="5272887" cy="640080"/>
           </a:xfrm>
           <a:prstGeom prst="roundRect">
@@ -4229,7 +4399,7 @@
             </a:avLst>
           </a:prstGeom>
           <a:solidFill>
-            <a:srgbClr val="115F5B"/>
+            <a:srgbClr val="274938"/>
           </a:solidFill>
           <a:ln>
             <a:noFill/>
@@ -4245,13 +4415,13 @@
       </p:sp>
       <p:sp>
         <p:nvSpPr>
-          <p:cNvPr id="11" name="TextBox 10"/>
+          <p:cNvPr id="12" name="TextBox 11"/>
           <p:cNvSpPr txBox="1"/>
           <p:nvPr/>
         </p:nvSpPr>
         <p:spPr>
           <a:xfrm>
-            <a:off x="6461607" y="1554480"/>
+            <a:off x="6461607" y="1600200"/>
             <a:ext cx="4907127" cy="640080"/>
           </a:xfrm>
           <a:prstGeom prst="rect">
@@ -4283,14 +4453,14 @@
       </p:sp>
       <p:sp>
         <p:nvSpPr>
-          <p:cNvPr id="12" name="TextBox 11"/>
+          <p:cNvPr id="13" name="TextBox 12"/>
           <p:cNvSpPr txBox="1"/>
           <p:nvPr/>
         </p:nvSpPr>
         <p:spPr>
           <a:xfrm>
-            <a:off x="6507327" y="2377440"/>
-            <a:ext cx="4815687" cy="3474720"/>
+            <a:off x="6507327" y="2423160"/>
+            <a:ext cx="4815687" cy="3657600"/>
           </a:xfrm>
           <a:prstGeom prst="rect">
             <a:avLst/>
@@ -4316,7 +4486,7 @@
             <a:r>
               <a:rPr sz="1500" b="0" i="0">
                 <a:solidFill>
-                  <a:srgbClr val="2B2B2B"/>
+                  <a:srgbClr val="26231F"/>
                 </a:solidFill>
               </a:rPr>
               <a:t>내용을 입력하세요</a:t>
@@ -4336,7 +4506,7 @@
             <a:r>
               <a:rPr sz="1500" b="0" i="0">
                 <a:solidFill>
-                  <a:srgbClr val="2B2B2B"/>
+                  <a:srgbClr val="26231F"/>
                 </a:solidFill>
               </a:rPr>
               <a:t>내용을 입력하세요</a:t>
@@ -4356,7 +4526,7 @@
             <a:r>
               <a:rPr sz="1500" b="0" i="0">
                 <a:solidFill>
-                  <a:srgbClr val="2B2B2B"/>
+                  <a:srgbClr val="26231F"/>
                 </a:solidFill>
               </a:rPr>
               <a:t>내용을 입력하세요</a:t>
@@ -4378,7 +4548,7 @@
     <p:bg>
       <p:bgPr>
         <a:solidFill>
-          <a:srgbClr val="FFFFFF"/>
+          <a:srgbClr val="EAFDF4"/>
         </a:solidFill>
         <a:effectLst/>
       </p:bgPr>
@@ -4398,14 +4568,14 @@
         </p:nvSpPr>
         <p:spPr>
           <a:xfrm>
-            <a:off x="-182880" y="6144768"/>
-            <a:ext cx="12557455" cy="731520"/>
-          </a:xfrm>
-          <a:prstGeom prst="wave">
+            <a:off x="640080" y="6400800"/>
+            <a:ext cx="10911535" cy="10972"/>
+          </a:xfrm>
+          <a:prstGeom prst="rect">
             <a:avLst/>
           </a:prstGeom>
           <a:solidFill>
-            <a:srgbClr val="D1FAF8"/>
+            <a:srgbClr val="26231F"/>
           </a:solidFill>
           <a:ln>
             <a:noFill/>
@@ -4421,20 +4591,58 @@
       </p:sp>
       <p:sp>
         <p:nvSpPr>
-          <p:cNvPr id="4" name="장식"/>
+          <p:cNvPr id="4" name="하단 라벨"/>
+          <p:cNvSpPr txBox="1"/>
+          <p:nvPr/>
+        </p:nvSpPr>
+        <p:spPr>
+          <a:xfrm>
+            <a:off x="640080" y="6437376"/>
+            <a:ext cx="5486400" cy="274320"/>
+          </a:xfrm>
+          <a:prstGeom prst="rect">
+            <a:avLst/>
+          </a:prstGeom>
+          <a:noFill/>
+        </p:spPr>
+        <p:txBody>
+          <a:bodyPr wrap="square" lIns="54864" rIns="54864" tIns="27432" bIns="27432" anchor="ctr">
+            <a:noAutofit/>
+          </a:bodyPr>
+          <a:lstStyle/>
+          <a:p>
+            <a:pPr algn="l">
+              <a:lnSpc>
+                <a:spcPct val="115000"/>
+              </a:lnSpc>
+            </a:pPr>
+            <a:r>
+              <a:rPr sz="900" b="1" i="0" spc="250">
+                <a:solidFill>
+                  <a:srgbClr val="26231F"/>
+                </a:solidFill>
+              </a:rPr>
+              <a:t>WEDDING</a:t>
+            </a:r>
+          </a:p>
+        </p:txBody>
+      </p:sp>
+      <p:sp>
+        <p:nvSpPr>
+          <p:cNvPr id="5" name="포인트"/>
           <p:cNvSpPr/>
           <p:nvPr/>
         </p:nvSpPr>
         <p:spPr>
           <a:xfrm>
-            <a:off x="-182880" y="6400800"/>
-            <a:ext cx="12557455" cy="502920"/>
-          </a:xfrm>
-          <a:prstGeom prst="wave">
+            <a:off x="11213287" y="6473952"/>
+            <a:ext cx="219456" cy="219456"/>
+          </a:xfrm>
+          <a:prstGeom prst="heart">
             <a:avLst/>
           </a:prstGeom>
           <a:solidFill>
-            <a:srgbClr val="26C5BD"/>
+            <a:srgbClr val="7BEAB3"/>
           </a:solidFill>
           <a:ln>
             <a:noFill/>
@@ -4460,8 +4668,8 @@
         </p:nvSpPr>
         <p:spPr>
           <a:xfrm>
-            <a:off x="640080" y="457200"/>
-            <a:ext cx="9722815" cy="868680"/>
+            <a:off x="640080" y="502920"/>
+            <a:ext cx="10911535" cy="914400"/>
           </a:xfrm>
         </p:spPr>
         <p:txBody>
@@ -4478,7 +4686,7 @@
             <a:r>
               <a:rPr sz="3000" b="1" i="0">
                 <a:solidFill>
-                  <a:srgbClr val="115F5B"/>
+                  <a:srgbClr val="26231F"/>
                 </a:solidFill>
               </a:rPr>
               <a:t>서로에게 하고 싶은 말</a:t>
@@ -4488,26 +4696,26 @@
       </p:sp>
       <p:sp>
         <p:nvSpPr>
-          <p:cNvPr id="5" name="왼쪽 칸"/>
+          <p:cNvPr id="6" name="왼쪽 칸"/>
           <p:cNvSpPr/>
           <p:nvPr/>
         </p:nvSpPr>
         <p:spPr>
           <a:xfrm>
-            <a:off x="640080" y="1554480"/>
-            <a:ext cx="5272887" cy="4389120"/>
+            <a:off x="640080" y="1600200"/>
+            <a:ext cx="5272887" cy="4572000"/>
           </a:xfrm>
           <a:prstGeom prst="roundRect">
             <a:avLst>
-              <a:gd name="adj" fmla="val 8000"/>
+              <a:gd name="adj" fmla="val 7000"/>
             </a:avLst>
           </a:prstGeom>
           <a:solidFill>
-            <a:srgbClr val="EEFCFB"/>
+            <a:srgbClr val="FFFFFF"/>
           </a:solidFill>
           <a:ln w="12700">
             <a:solidFill>
-              <a:srgbClr val="D1FAF8"/>
+              <a:srgbClr val="A5F3CC"/>
             </a:solidFill>
           </a:ln>
         </p:spPr>
@@ -4521,13 +4729,13 @@
       </p:sp>
       <p:sp>
         <p:nvSpPr>
-          <p:cNvPr id="6" name="칸 제목 바"/>
+          <p:cNvPr id="7" name="칸 제목 바"/>
           <p:cNvSpPr/>
           <p:nvPr/>
         </p:nvSpPr>
         <p:spPr>
           <a:xfrm>
-            <a:off x="640080" y="1554480"/>
+            <a:off x="640080" y="1600200"/>
             <a:ext cx="5272887" cy="640080"/>
           </a:xfrm>
           <a:prstGeom prst="roundRect">
@@ -4536,7 +4744,7 @@
             </a:avLst>
           </a:prstGeom>
           <a:solidFill>
-            <a:srgbClr val="26C5BD"/>
+            <a:srgbClr val="7BEAB3"/>
           </a:solidFill>
           <a:ln>
             <a:noFill/>
@@ -4552,13 +4760,13 @@
       </p:sp>
       <p:sp>
         <p:nvSpPr>
-          <p:cNvPr id="7" name="TextBox 6"/>
+          <p:cNvPr id="8" name="TextBox 7"/>
           <p:cNvSpPr txBox="1"/>
           <p:nvPr/>
         </p:nvSpPr>
         <p:spPr>
           <a:xfrm>
-            <a:off x="822959" y="1554480"/>
+            <a:off x="822959" y="1600200"/>
             <a:ext cx="4907127" cy="640080"/>
           </a:xfrm>
           <a:prstGeom prst="rect">
@@ -4580,7 +4788,7 @@
             <a:r>
               <a:rPr sz="1800" b="1" i="0">
                 <a:solidFill>
-                  <a:srgbClr val="FFFFFF"/>
+                  <a:srgbClr val="26231F"/>
                 </a:solidFill>
               </a:rPr>
               <a:t>신랑이 신부에게</a:t>
@@ -4590,14 +4798,14 @@
       </p:sp>
       <p:sp>
         <p:nvSpPr>
-          <p:cNvPr id="8" name="TextBox 7"/>
+          <p:cNvPr id="9" name="TextBox 8"/>
           <p:cNvSpPr txBox="1"/>
           <p:nvPr/>
         </p:nvSpPr>
         <p:spPr>
           <a:xfrm>
-            <a:off x="868680" y="2377440"/>
-            <a:ext cx="4815687" cy="3474720"/>
+            <a:off x="868680" y="2423160"/>
+            <a:ext cx="4815687" cy="3657600"/>
           </a:xfrm>
           <a:prstGeom prst="rect">
             <a:avLst/>
@@ -4623,7 +4831,7 @@
             <a:r>
               <a:rPr sz="1500" b="0" i="0">
                 <a:solidFill>
-                  <a:srgbClr val="2B2B2B"/>
+                  <a:srgbClr val="26231F"/>
                 </a:solidFill>
               </a:rPr>
               <a:t>하고 싶은 말을 적어 주세요</a:t>
@@ -4633,26 +4841,26 @@
       </p:sp>
       <p:sp>
         <p:nvSpPr>
-          <p:cNvPr id="9" name="오른쪽 칸"/>
+          <p:cNvPr id="10" name="오른쪽 칸"/>
           <p:cNvSpPr/>
           <p:nvPr/>
         </p:nvSpPr>
         <p:spPr>
           <a:xfrm>
-            <a:off x="6278727" y="1554480"/>
-            <a:ext cx="5272887" cy="4389120"/>
+            <a:off x="6278727" y="1600200"/>
+            <a:ext cx="5272887" cy="4572000"/>
           </a:xfrm>
           <a:prstGeom prst="roundRect">
             <a:avLst>
-              <a:gd name="adj" fmla="val 8000"/>
+              <a:gd name="adj" fmla="val 7000"/>
             </a:avLst>
           </a:prstGeom>
           <a:solidFill>
-            <a:srgbClr val="D1FAF8"/>
+            <a:srgbClr val="FFFFFF"/>
           </a:solidFill>
           <a:ln w="12700">
             <a:solidFill>
-              <a:srgbClr val="D1FAF8"/>
+              <a:srgbClr val="A5F3CC"/>
             </a:solidFill>
           </a:ln>
         </p:spPr>
@@ -4666,13 +4874,13 @@
       </p:sp>
       <p:sp>
         <p:nvSpPr>
-          <p:cNvPr id="10" name="칸 제목 바"/>
+          <p:cNvPr id="11" name="칸 제목 바"/>
           <p:cNvSpPr/>
           <p:nvPr/>
         </p:nvSpPr>
         <p:spPr>
           <a:xfrm>
-            <a:off x="6278727" y="1554480"/>
+            <a:off x="6278727" y="1600200"/>
             <a:ext cx="5272887" cy="640080"/>
           </a:xfrm>
           <a:prstGeom prst="roundRect">
@@ -4681,7 +4889,7 @@
             </a:avLst>
           </a:prstGeom>
           <a:solidFill>
-            <a:srgbClr val="115F5B"/>
+            <a:srgbClr val="274938"/>
           </a:solidFill>
           <a:ln>
             <a:noFill/>
@@ -4697,13 +4905,13 @@
       </p:sp>
       <p:sp>
         <p:nvSpPr>
-          <p:cNvPr id="11" name="TextBox 10"/>
+          <p:cNvPr id="12" name="TextBox 11"/>
           <p:cNvSpPr txBox="1"/>
           <p:nvPr/>
         </p:nvSpPr>
         <p:spPr>
           <a:xfrm>
-            <a:off x="6461607" y="1554480"/>
+            <a:off x="6461607" y="1600200"/>
             <a:ext cx="4907127" cy="640080"/>
           </a:xfrm>
           <a:prstGeom prst="rect">
@@ -4735,14 +4943,14 @@
       </p:sp>
       <p:sp>
         <p:nvSpPr>
-          <p:cNvPr id="12" name="TextBox 11"/>
+          <p:cNvPr id="13" name="TextBox 12"/>
           <p:cNvSpPr txBox="1"/>
           <p:nvPr/>
         </p:nvSpPr>
         <p:spPr>
           <a:xfrm>
-            <a:off x="6507327" y="2377440"/>
-            <a:ext cx="4815687" cy="3474720"/>
+            <a:off x="6507327" y="2423160"/>
+            <a:ext cx="4815687" cy="3657600"/>
           </a:xfrm>
           <a:prstGeom prst="rect">
             <a:avLst/>
@@ -4768,7 +4976,7 @@
             <a:r>
               <a:rPr sz="1500" b="0" i="0">
                 <a:solidFill>
-                  <a:srgbClr val="2B2B2B"/>
+                  <a:srgbClr val="26231F"/>
                 </a:solidFill>
               </a:rPr>
               <a:t>하고 싶은 말을 적어 주세요</a:t>
@@ -4790,7 +4998,7 @@
     <p:bg>
       <p:bgPr>
         <a:solidFill>
-          <a:srgbClr val="FFFFFF"/>
+          <a:srgbClr val="EAFDF4"/>
         </a:solidFill>
         <a:effectLst/>
       </p:bgPr>
@@ -4810,14 +5018,14 @@
         </p:nvSpPr>
         <p:spPr>
           <a:xfrm>
-            <a:off x="-182880" y="6144768"/>
-            <a:ext cx="12557455" cy="731520"/>
-          </a:xfrm>
-          <a:prstGeom prst="wave">
+            <a:off x="640080" y="6400800"/>
+            <a:ext cx="10911535" cy="10972"/>
+          </a:xfrm>
+          <a:prstGeom prst="rect">
             <a:avLst/>
           </a:prstGeom>
           <a:solidFill>
-            <a:srgbClr val="D1FAF8"/>
+            <a:srgbClr val="26231F"/>
           </a:solidFill>
           <a:ln>
             <a:noFill/>
@@ -4833,20 +5041,58 @@
       </p:sp>
       <p:sp>
         <p:nvSpPr>
-          <p:cNvPr id="4" name="장식"/>
+          <p:cNvPr id="4" name="하단 라벨"/>
+          <p:cNvSpPr txBox="1"/>
+          <p:nvPr/>
+        </p:nvSpPr>
+        <p:spPr>
+          <a:xfrm>
+            <a:off x="640080" y="6437376"/>
+            <a:ext cx="5486400" cy="274320"/>
+          </a:xfrm>
+          <a:prstGeom prst="rect">
+            <a:avLst/>
+          </a:prstGeom>
+          <a:noFill/>
+        </p:spPr>
+        <p:txBody>
+          <a:bodyPr wrap="square" lIns="54864" rIns="54864" tIns="27432" bIns="27432" anchor="ctr">
+            <a:noAutofit/>
+          </a:bodyPr>
+          <a:lstStyle/>
+          <a:p>
+            <a:pPr algn="l">
+              <a:lnSpc>
+                <a:spcPct val="115000"/>
+              </a:lnSpc>
+            </a:pPr>
+            <a:r>
+              <a:rPr sz="900" b="1" i="0" spc="250">
+                <a:solidFill>
+                  <a:srgbClr val="26231F"/>
+                </a:solidFill>
+              </a:rPr>
+              <a:t>WEDDING</a:t>
+            </a:r>
+          </a:p>
+        </p:txBody>
+      </p:sp>
+      <p:sp>
+        <p:nvSpPr>
+          <p:cNvPr id="5" name="포인트"/>
           <p:cNvSpPr/>
           <p:nvPr/>
         </p:nvSpPr>
         <p:spPr>
           <a:xfrm>
-            <a:off x="-182880" y="6400800"/>
-            <a:ext cx="12557455" cy="502920"/>
-          </a:xfrm>
-          <a:prstGeom prst="wave">
+            <a:off x="11213287" y="6473952"/>
+            <a:ext cx="219456" cy="219456"/>
+          </a:xfrm>
+          <a:prstGeom prst="heart">
             <a:avLst/>
           </a:prstGeom>
           <a:solidFill>
-            <a:srgbClr val="26C5BD"/>
+            <a:srgbClr val="7BEAB3"/>
           </a:solidFill>
           <a:ln>
             <a:noFill/>
@@ -4872,8 +5118,8 @@
         </p:nvSpPr>
         <p:spPr>
           <a:xfrm>
-            <a:off x="640080" y="457200"/>
-            <a:ext cx="9722815" cy="868680"/>
+            <a:off x="640080" y="502920"/>
+            <a:ext cx="10911535" cy="914400"/>
           </a:xfrm>
         </p:spPr>
         <p:txBody>
@@ -4890,7 +5136,7 @@
             <a:r>
               <a:rPr sz="3000" b="1" i="0">
                 <a:solidFill>
-                  <a:srgbClr val="115F5B"/>
+                  <a:srgbClr val="26231F"/>
                 </a:solidFill>
               </a:rPr>
               <a:t>웨딩 사진</a:t>
@@ -4900,14 +5146,14 @@
       </p:sp>
       <p:sp>
         <p:nvSpPr>
-          <p:cNvPr id="5" name="사진 자리"/>
+          <p:cNvPr id="6" name="사진 자리"/>
           <p:cNvSpPr/>
           <p:nvPr/>
         </p:nvSpPr>
         <p:spPr>
           <a:xfrm>
-            <a:off x="640080" y="1554480"/>
-            <a:ext cx="3515258" cy="2103120"/>
+            <a:off x="640080" y="1600200"/>
+            <a:ext cx="3515258" cy="2194560"/>
           </a:xfrm>
           <a:prstGeom prst="roundRect">
             <a:avLst>
@@ -4915,12 +5161,10 @@
             </a:avLst>
           </a:prstGeom>
           <a:solidFill>
-            <a:srgbClr val="D1FAF8"/>
+            <a:srgbClr val="D1FAE6"/>
           </a:solidFill>
           <a:ln w="19050">
-            <a:solidFill>
-              <a:srgbClr val="26C5BD"/>
-            </a:solidFill>
+            <a:noFill/>
             <a:prstDash val="dash"/>
           </a:ln>
         </p:spPr>
@@ -4938,7 +5182,7 @@
             <a:r>
               <a:rPr sz="1200" b="0" i="0">
                 <a:solidFill>
-                  <a:srgbClr val="115F5B"/>
+                  <a:srgbClr val="8E8780"/>
                 </a:solidFill>
               </a:rPr>
               <a:t>사진 1</a:t>
@@ -4948,14 +5192,14 @@
       </p:sp>
       <p:sp>
         <p:nvSpPr>
-          <p:cNvPr id="6" name="사진 자리"/>
+          <p:cNvPr id="7" name="사진 자리"/>
           <p:cNvSpPr/>
           <p:nvPr/>
         </p:nvSpPr>
         <p:spPr>
           <a:xfrm>
-            <a:off x="4338218" y="1554480"/>
-            <a:ext cx="3515258" cy="2103120"/>
+            <a:off x="4338218" y="1600200"/>
+            <a:ext cx="3515258" cy="2194560"/>
           </a:xfrm>
           <a:prstGeom prst="roundRect">
             <a:avLst>
@@ -4963,12 +5207,10 @@
             </a:avLst>
           </a:prstGeom>
           <a:solidFill>
-            <a:srgbClr val="D1FAF8"/>
+            <a:srgbClr val="D1FAE6"/>
           </a:solidFill>
           <a:ln w="19050">
-            <a:solidFill>
-              <a:srgbClr val="26C5BD"/>
-            </a:solidFill>
+            <a:noFill/>
             <a:prstDash val="dash"/>
           </a:ln>
         </p:spPr>
@@ -4986,7 +5228,7 @@
             <a:r>
               <a:rPr sz="1200" b="0" i="0">
                 <a:solidFill>
-                  <a:srgbClr val="115F5B"/>
+                  <a:srgbClr val="8E8780"/>
                 </a:solidFill>
               </a:rPr>
               <a:t>사진 2</a:t>
@@ -4996,14 +5238,14 @@
       </p:sp>
       <p:sp>
         <p:nvSpPr>
-          <p:cNvPr id="7" name="사진 자리"/>
+          <p:cNvPr id="8" name="사진 자리"/>
           <p:cNvSpPr/>
           <p:nvPr/>
         </p:nvSpPr>
         <p:spPr>
           <a:xfrm>
-            <a:off x="8036356" y="1554480"/>
-            <a:ext cx="3515258" cy="2103120"/>
+            <a:off x="8036356" y="1600200"/>
+            <a:ext cx="3515258" cy="2194560"/>
           </a:xfrm>
           <a:prstGeom prst="roundRect">
             <a:avLst>
@@ -5011,12 +5253,10 @@
             </a:avLst>
           </a:prstGeom>
           <a:solidFill>
-            <a:srgbClr val="D1FAF8"/>
+            <a:srgbClr val="D1FAE6"/>
           </a:solidFill>
           <a:ln w="19050">
-            <a:solidFill>
-              <a:srgbClr val="26C5BD"/>
-            </a:solidFill>
+            <a:noFill/>
             <a:prstDash val="dash"/>
           </a:ln>
         </p:spPr>
@@ -5034,7 +5274,7 @@
             <a:r>
               <a:rPr sz="1200" b="0" i="0">
                 <a:solidFill>
-                  <a:srgbClr val="115F5B"/>
+                  <a:srgbClr val="8E8780"/>
                 </a:solidFill>
               </a:rPr>
               <a:t>사진 3</a:t>
@@ -5044,14 +5284,14 @@
       </p:sp>
       <p:sp>
         <p:nvSpPr>
-          <p:cNvPr id="8" name="사진 자리"/>
+          <p:cNvPr id="9" name="사진 자리"/>
           <p:cNvSpPr/>
           <p:nvPr/>
         </p:nvSpPr>
         <p:spPr>
           <a:xfrm>
-            <a:off x="640080" y="3840480"/>
-            <a:ext cx="3515258" cy="2103120"/>
+            <a:off x="640080" y="3977639"/>
+            <a:ext cx="3515258" cy="2194560"/>
           </a:xfrm>
           <a:prstGeom prst="roundRect">
             <a:avLst>
@@ -5059,12 +5299,10 @@
             </a:avLst>
           </a:prstGeom>
           <a:solidFill>
-            <a:srgbClr val="D1FAF8"/>
+            <a:srgbClr val="D1FAE6"/>
           </a:solidFill>
           <a:ln w="19050">
-            <a:solidFill>
-              <a:srgbClr val="26C5BD"/>
-            </a:solidFill>
+            <a:noFill/>
             <a:prstDash val="dash"/>
           </a:ln>
         </p:spPr>
@@ -5082,7 +5320,7 @@
             <a:r>
               <a:rPr sz="1200" b="0" i="0">
                 <a:solidFill>
-                  <a:srgbClr val="115F5B"/>
+                  <a:srgbClr val="8E8780"/>
                 </a:solidFill>
               </a:rPr>
               <a:t>사진 4</a:t>
@@ -5092,14 +5330,14 @@
       </p:sp>
       <p:sp>
         <p:nvSpPr>
-          <p:cNvPr id="9" name="사진 자리"/>
+          <p:cNvPr id="10" name="사진 자리"/>
           <p:cNvSpPr/>
           <p:nvPr/>
         </p:nvSpPr>
         <p:spPr>
           <a:xfrm>
-            <a:off x="4338218" y="3840480"/>
-            <a:ext cx="3515258" cy="2103120"/>
+            <a:off x="4338218" y="3977639"/>
+            <a:ext cx="3515258" cy="2194560"/>
           </a:xfrm>
           <a:prstGeom prst="roundRect">
             <a:avLst>
@@ -5107,12 +5345,10 @@
             </a:avLst>
           </a:prstGeom>
           <a:solidFill>
-            <a:srgbClr val="D1FAF8"/>
+            <a:srgbClr val="D1FAE6"/>
           </a:solidFill>
           <a:ln w="19050">
-            <a:solidFill>
-              <a:srgbClr val="26C5BD"/>
-            </a:solidFill>
+            <a:noFill/>
             <a:prstDash val="dash"/>
           </a:ln>
         </p:spPr>
@@ -5130,7 +5366,7 @@
             <a:r>
               <a:rPr sz="1200" b="0" i="0">
                 <a:solidFill>
-                  <a:srgbClr val="115F5B"/>
+                  <a:srgbClr val="8E8780"/>
                 </a:solidFill>
               </a:rPr>
               <a:t>사진 5</a:t>
@@ -5140,14 +5376,14 @@
       </p:sp>
       <p:sp>
         <p:nvSpPr>
-          <p:cNvPr id="10" name="사진 자리"/>
+          <p:cNvPr id="11" name="사진 자리"/>
           <p:cNvSpPr/>
           <p:nvPr/>
         </p:nvSpPr>
         <p:spPr>
           <a:xfrm>
-            <a:off x="8036356" y="3840480"/>
-            <a:ext cx="3515258" cy="2103120"/>
+            <a:off x="8036356" y="3977639"/>
+            <a:ext cx="3515258" cy="2194560"/>
           </a:xfrm>
           <a:prstGeom prst="roundRect">
             <a:avLst>
@@ -5155,12 +5391,10 @@
             </a:avLst>
           </a:prstGeom>
           <a:solidFill>
-            <a:srgbClr val="D1FAF8"/>
+            <a:srgbClr val="D1FAE6"/>
           </a:solidFill>
           <a:ln w="19050">
-            <a:solidFill>
-              <a:srgbClr val="26C5BD"/>
-            </a:solidFill>
+            <a:noFill/>
             <a:prstDash val="dash"/>
           </a:ln>
         </p:spPr>
@@ -5178,7 +5412,7 @@
             <a:r>
               <a:rPr sz="1200" b="0" i="0">
                 <a:solidFill>
-                  <a:srgbClr val="115F5B"/>
+                  <a:srgbClr val="8E8780"/>
                 </a:solidFill>
               </a:rPr>
               <a:t>사진 6</a:t>
@@ -5197,6 +5431,14 @@
 <file path=ppt/slides/slide6.xml><?xml version="1.0" encoding="utf-8"?>
 <p:sld xmlns:a="http://schemas.openxmlformats.org/drawingml/2006/main" xmlns:p="http://schemas.openxmlformats.org/presentationml/2006/main" xmlns:r="http://schemas.openxmlformats.org/officeDocument/2006/relationships">
   <p:cSld>
+    <p:bg>
+      <p:bgPr>
+        <a:solidFill>
+          <a:srgbClr val="EAFDF4"/>
+        </a:solidFill>
+        <a:effectLst/>
+      </p:bgPr>
+    </p:bg>
     <p:spTree>
       <p:nvGrpSpPr>
         <p:cNvPr id="1" name=""/>
@@ -5204,30 +5446,120 @@
         <p:nvPr/>
       </p:nvGrpSpPr>
       <p:grpSpPr/>
-      <p:pic>
-        <p:nvPicPr>
-          <p:cNvPr id="3" name="표지 그림" descr="wedding-21.jpg"/>
-          <p:cNvPicPr>
-            <a:picLocks noChangeAspect="1"/>
-          </p:cNvPicPr>
+      <p:sp>
+        <p:nvSpPr>
+          <p:cNvPr id="3" name="사진 자리"/>
+          <p:cNvSpPr/>
           <p:nvPr/>
-        </p:nvPicPr>
-        <p:blipFill>
-          <a:blip r:embed="rId2"/>
-          <a:stretch>
-            <a:fillRect/>
-          </a:stretch>
-        </p:blipFill>
-        <p:spPr>
-          <a:xfrm>
-            <a:off x="0" y="0"/>
-            <a:ext cx="12191695" cy="6858000"/>
+        </p:nvSpPr>
+        <p:spPr>
+          <a:xfrm>
+            <a:off x="7071183" y="960120"/>
+            <a:ext cx="3657508" cy="4526280"/>
+          </a:xfrm>
+          <a:prstGeom prst="roundRect">
+            <a:avLst>
+              <a:gd name="adj" fmla="val 4000"/>
+            </a:avLst>
+          </a:prstGeom>
+          <a:solidFill>
+            <a:srgbClr val="A5F3CC"/>
+          </a:solidFill>
+          <a:ln>
+            <a:noFill/>
+          </a:ln>
+        </p:spPr>
+        <p:txBody>
+          <a:bodyPr rtlCol="0" anchor="ctr" wrap="square" lIns="54864" rIns="54864" tIns="27432" bIns="27432">
+            <a:noAutofit/>
+          </a:bodyPr>
+          <a:lstStyle/>
+          <a:p>
+            <a:pPr algn="ctr">
+              <a:lnSpc>
+                <a:spcPct val="100000"/>
+              </a:lnSpc>
+            </a:pPr>
+            <a:r>
+              <a:rPr sz="1400" b="0" i="0">
+                <a:solidFill>
+                  <a:srgbClr val="274938"/>
+                </a:solidFill>
+              </a:rPr>
+              <a:t>사진을 넣어 주세요</a:t>
+            </a:r>
+          </a:p>
+        </p:txBody>
+      </p:sp>
+      <p:sp>
+        <p:nvSpPr>
+          <p:cNvPr id="4" name="장식"/>
+          <p:cNvSpPr/>
+          <p:nvPr/>
+        </p:nvSpPr>
+        <p:spPr>
+          <a:xfrm>
+            <a:off x="7558851" y="1234439"/>
+            <a:ext cx="3657508" cy="4526280"/>
+          </a:xfrm>
+          <a:prstGeom prst="roundRect">
+            <a:avLst>
+              <a:gd name="adj" fmla="val 4000"/>
+            </a:avLst>
+          </a:prstGeom>
+          <a:noFill/>
+          <a:ln w="9525">
+            <a:solidFill>
+              <a:srgbClr val="26231F"/>
+            </a:solidFill>
+          </a:ln>
+        </p:spPr>
+        <p:txBody>
+          <a:bodyPr rtlCol="0" anchor="ctr"/>
+          <a:lstStyle/>
+          <a:p>
+            <a:pPr algn="ctr"/>
+          </a:p>
+        </p:txBody>
+      </p:sp>
+      <p:sp>
+        <p:nvSpPr>
+          <p:cNvPr id="5" name="라벨"/>
+          <p:cNvSpPr txBox="1"/>
+          <p:nvPr/>
+        </p:nvSpPr>
+        <p:spPr>
+          <a:xfrm>
+            <a:off x="822960" y="2148840"/>
+            <a:ext cx="5608179" cy="274320"/>
           </a:xfrm>
           <a:prstGeom prst="rect">
             <a:avLst/>
           </a:prstGeom>
-        </p:spPr>
-      </p:pic>
+          <a:noFill/>
+        </p:spPr>
+        <p:txBody>
+          <a:bodyPr wrap="square" lIns="54864" rIns="54864" tIns="27432" bIns="27432" anchor="t">
+            <a:noAutofit/>
+          </a:bodyPr>
+          <a:lstStyle/>
+          <a:p>
+            <a:pPr algn="l">
+              <a:lnSpc>
+                <a:spcPct val="115000"/>
+              </a:lnSpc>
+            </a:pPr>
+            <a:r>
+              <a:rPr sz="1000" b="1" i="0" spc="250">
+                <a:solidFill>
+                  <a:srgbClr val="26231F"/>
+                </a:solidFill>
+              </a:rPr>
+              <a:t>WEDDING</a:t>
+            </a:r>
+          </a:p>
+        </p:txBody>
+      </p:sp>
       <p:sp>
         <p:nvSpPr>
           <p:cNvPr id="2" name="Title 1"/>
@@ -5240,8 +5572,8 @@
         </p:nvSpPr>
         <p:spPr>
           <a:xfrm>
-            <a:off x="853418" y="2057400"/>
-            <a:ext cx="6095847" cy="1554480"/>
+            <a:off x="822960" y="2606040"/>
+            <a:ext cx="5608179" cy="1188720"/>
           </a:xfrm>
         </p:spPr>
         <p:txBody>
@@ -5258,7 +5590,7 @@
             <a:r>
               <a:rPr sz="3400" b="1" i="0">
                 <a:solidFill>
-                  <a:srgbClr val="115F5B"/>
+                  <a:srgbClr val="26231F"/>
                 </a:solidFill>
               </a:rPr>
               <a:t>와 주셔서 고맙습니다</a:t>
@@ -5268,14 +5600,14 @@
       </p:sp>
       <p:sp>
         <p:nvSpPr>
-          <p:cNvPr id="4" name="한 줄 문구"/>
+          <p:cNvPr id="6" name="한 줄 문구"/>
           <p:cNvSpPr txBox="1"/>
           <p:nvPr/>
         </p:nvSpPr>
         <p:spPr>
           <a:xfrm>
-            <a:off x="853418" y="3749039"/>
-            <a:ext cx="6095847" cy="822960"/>
+            <a:off x="822960" y="3886200"/>
+            <a:ext cx="5608179" cy="822960"/>
           </a:xfrm>
           <a:prstGeom prst="rect">
             <a:avLst/>
@@ -5294,9 +5626,9 @@
               </a:lnSpc>
             </a:pPr>
             <a:r>
-              <a:rPr sz="1700" b="0" i="1">
-                <a:solidFill>
-                  <a:srgbClr val="115F5B"/>
+              <a:rPr sz="1700" b="0" i="0">
+                <a:solidFill>
+                  <a:srgbClr val="26231F"/>
                 </a:solidFill>
               </a:rPr>
               <a:t>잘 살겠습니다</a:t>
@@ -5306,14 +5638,14 @@
       </p:sp>
       <p:sp>
         <p:nvSpPr>
-          <p:cNvPr id="5" name="안내 문구"/>
+          <p:cNvPr id="7" name="안내 문구"/>
           <p:cNvSpPr txBox="1"/>
           <p:nvPr/>
         </p:nvSpPr>
         <p:spPr>
           <a:xfrm>
-            <a:off x="853418" y="4617720"/>
-            <a:ext cx="6095847" cy="914400"/>
+            <a:off x="822960" y="4754880"/>
+            <a:ext cx="5608179" cy="914400"/>
           </a:xfrm>
           <a:prstGeom prst="rect">
             <a:avLst/>
@@ -5334,7 +5666,7 @@
             <a:r>
               <a:rPr sz="1400" b="0" i="0">
                 <a:solidFill>
-                  <a:srgbClr val="666666"/>
+                  <a:srgbClr val="26231F"/>
                 </a:solidFill>
               </a:rPr>
               <a:t>신랑 이름 ♥ 신부 이름</a:t>
@@ -5361,34 +5693,34 @@
         <a:sysClr val="window" lastClr="FFFFFF"/>
       </a:lt1>
       <a:dk2>
-        <a:srgbClr val="115F5B"/>
+        <a:srgbClr val="274938"/>
       </a:dk2>
       <a:lt2>
-        <a:srgbClr val="EEFCFB"/>
+        <a:srgbClr val="EAFDF4"/>
       </a:lt2>
       <a:accent1>
-        <a:srgbClr val="26C5BD"/>
+        <a:srgbClr val="7BEAB3"/>
       </a:accent1>
       <a:accent2>
-        <a:srgbClr val="209DB6"/>
+        <a:srgbClr val="9FEFED"/>
       </a:accent2>
       <a:accent3>
-        <a:srgbClr val="115F5B"/>
+        <a:srgbClr val="274938"/>
       </a:accent3>
       <a:accent4>
-        <a:srgbClr val="D1FAF8"/>
+        <a:srgbClr val="D1FAE6"/>
       </a:accent4>
       <a:accent5>
-        <a:srgbClr val="23B1BA"/>
+        <a:srgbClr val="8DECD0"/>
       </a:accent5>
       <a:accent6>
-        <a:srgbClr val="709F9D"/>
+        <a:srgbClr val="7D9288"/>
       </a:accent6>
       <a:hlink>
-        <a:srgbClr val="26C5BD"/>
+        <a:srgbClr val="7BEAB3"/>
       </a:hlink>
       <a:folHlink>
-        <a:srgbClr val="115F5B"/>
+        <a:srgbClr val="274938"/>
       </a:folHlink>
     </a:clrScheme>
     <a:fontScheme name="Office">
